--- a/img/_diagrammes.pptx
+++ b/img/_diagrammes.pptx
@@ -262,7 +262,7 @@
           <a:p>
             <a:fld id="{3CF855FD-75F4-4EF8-A156-DF28C5688070}" type="datetimeFigureOut">
               <a:rPr lang="fr-FR" smtClean="0"/>
-              <a:t>06/03/2026</a:t>
+              <a:t>09/03/2026</a:t>
             </a:fld>
             <a:endParaRPr lang="fr-FR"/>
           </a:p>
@@ -462,7 +462,7 @@
           <a:p>
             <a:fld id="{3CF855FD-75F4-4EF8-A156-DF28C5688070}" type="datetimeFigureOut">
               <a:rPr lang="fr-FR" smtClean="0"/>
-              <a:t>06/03/2026</a:t>
+              <a:t>09/03/2026</a:t>
             </a:fld>
             <a:endParaRPr lang="fr-FR"/>
           </a:p>
@@ -672,7 +672,7 @@
           <a:p>
             <a:fld id="{3CF855FD-75F4-4EF8-A156-DF28C5688070}" type="datetimeFigureOut">
               <a:rPr lang="fr-FR" smtClean="0"/>
-              <a:t>06/03/2026</a:t>
+              <a:t>09/03/2026</a:t>
             </a:fld>
             <a:endParaRPr lang="fr-FR"/>
           </a:p>
@@ -872,7 +872,7 @@
           <a:p>
             <a:fld id="{3CF855FD-75F4-4EF8-A156-DF28C5688070}" type="datetimeFigureOut">
               <a:rPr lang="fr-FR" smtClean="0"/>
-              <a:t>06/03/2026</a:t>
+              <a:t>09/03/2026</a:t>
             </a:fld>
             <a:endParaRPr lang="fr-FR"/>
           </a:p>
@@ -1148,7 +1148,7 @@
           <a:p>
             <a:fld id="{3CF855FD-75F4-4EF8-A156-DF28C5688070}" type="datetimeFigureOut">
               <a:rPr lang="fr-FR" smtClean="0"/>
-              <a:t>06/03/2026</a:t>
+              <a:t>09/03/2026</a:t>
             </a:fld>
             <a:endParaRPr lang="fr-FR"/>
           </a:p>
@@ -1416,7 +1416,7 @@
           <a:p>
             <a:fld id="{3CF855FD-75F4-4EF8-A156-DF28C5688070}" type="datetimeFigureOut">
               <a:rPr lang="fr-FR" smtClean="0"/>
-              <a:t>06/03/2026</a:t>
+              <a:t>09/03/2026</a:t>
             </a:fld>
             <a:endParaRPr lang="fr-FR"/>
           </a:p>
@@ -1831,7 +1831,7 @@
           <a:p>
             <a:fld id="{3CF855FD-75F4-4EF8-A156-DF28C5688070}" type="datetimeFigureOut">
               <a:rPr lang="fr-FR" smtClean="0"/>
-              <a:t>06/03/2026</a:t>
+              <a:t>09/03/2026</a:t>
             </a:fld>
             <a:endParaRPr lang="fr-FR"/>
           </a:p>
@@ -1973,7 +1973,7 @@
           <a:p>
             <a:fld id="{3CF855FD-75F4-4EF8-A156-DF28C5688070}" type="datetimeFigureOut">
               <a:rPr lang="fr-FR" smtClean="0"/>
-              <a:t>06/03/2026</a:t>
+              <a:t>09/03/2026</a:t>
             </a:fld>
             <a:endParaRPr lang="fr-FR"/>
           </a:p>
@@ -2086,7 +2086,7 @@
           <a:p>
             <a:fld id="{3CF855FD-75F4-4EF8-A156-DF28C5688070}" type="datetimeFigureOut">
               <a:rPr lang="fr-FR" smtClean="0"/>
-              <a:t>06/03/2026</a:t>
+              <a:t>09/03/2026</a:t>
             </a:fld>
             <a:endParaRPr lang="fr-FR"/>
           </a:p>
@@ -2399,7 +2399,7 @@
           <a:p>
             <a:fld id="{3CF855FD-75F4-4EF8-A156-DF28C5688070}" type="datetimeFigureOut">
               <a:rPr lang="fr-FR" smtClean="0"/>
-              <a:t>06/03/2026</a:t>
+              <a:t>09/03/2026</a:t>
             </a:fld>
             <a:endParaRPr lang="fr-FR"/>
           </a:p>
@@ -2688,7 +2688,7 @@
           <a:p>
             <a:fld id="{3CF855FD-75F4-4EF8-A156-DF28C5688070}" type="datetimeFigureOut">
               <a:rPr lang="fr-FR" smtClean="0"/>
-              <a:t>06/03/2026</a:t>
+              <a:t>09/03/2026</a:t>
             </a:fld>
             <a:endParaRPr lang="fr-FR"/>
           </a:p>
@@ -2931,7 +2931,7 @@
           <a:p>
             <a:fld id="{3CF855FD-75F4-4EF8-A156-DF28C5688070}" type="datetimeFigureOut">
               <a:rPr lang="fr-FR" smtClean="0"/>
-              <a:t>06/03/2026</a:t>
+              <a:t>09/03/2026</a:t>
             </a:fld>
             <a:endParaRPr lang="fr-FR"/>
           </a:p>
@@ -3348,114 +3348,6 @@
           <a:chExt cx="0" cy="0"/>
         </a:xfrm>
       </p:grpSpPr>
-      <p:pic>
-        <p:nvPicPr>
-          <p:cNvPr id="22" name="Picture 21">
-            <a:extLst>
-              <a:ext uri="{FF2B5EF4-FFF2-40B4-BE49-F238E27FC236}">
-                <a16:creationId xmlns:a16="http://schemas.microsoft.com/office/drawing/2014/main" id="{D45A7F54-9745-4992-81A8-2B9984A8000E}"/>
-              </a:ext>
-            </a:extLst>
-          </p:cNvPr>
-          <p:cNvPicPr>
-            <a:picLocks noChangeAspect="1"/>
-          </p:cNvPicPr>
-          <p:nvPr/>
-        </p:nvPicPr>
-        <p:blipFill>
-          <a:blip r:embed="rId2">
-            <a:extLst>
-              <a:ext uri="{28A0092B-C50C-407E-A947-70E740481C1C}">
-                <a14:useLocalDpi xmlns:a14="http://schemas.microsoft.com/office/drawing/2010/main" val="0"/>
-              </a:ext>
-            </a:extLst>
-          </a:blip>
-          <a:stretch>
-            <a:fillRect/>
-          </a:stretch>
-        </p:blipFill>
-        <p:spPr>
-          <a:xfrm>
-            <a:off x="3365824" y="1091817"/>
-            <a:ext cx="798700" cy="651813"/>
-          </a:xfrm>
-          <a:prstGeom prst="rect">
-            <a:avLst/>
-          </a:prstGeom>
-        </p:spPr>
-      </p:pic>
-      <p:pic>
-        <p:nvPicPr>
-          <p:cNvPr id="21" name="Picture 20">
-            <a:extLst>
-              <a:ext uri="{FF2B5EF4-FFF2-40B4-BE49-F238E27FC236}">
-                <a16:creationId xmlns:a16="http://schemas.microsoft.com/office/drawing/2014/main" id="{F54253FB-F21A-4289-B1C1-9BD07378E76E}"/>
-              </a:ext>
-            </a:extLst>
-          </p:cNvPr>
-          <p:cNvPicPr>
-            <a:picLocks noChangeAspect="1"/>
-          </p:cNvPicPr>
-          <p:nvPr/>
-        </p:nvPicPr>
-        <p:blipFill>
-          <a:blip r:embed="rId2">
-            <a:extLst>
-              <a:ext uri="{28A0092B-C50C-407E-A947-70E740481C1C}">
-                <a14:useLocalDpi xmlns:a14="http://schemas.microsoft.com/office/drawing/2010/main" val="0"/>
-              </a:ext>
-            </a:extLst>
-          </a:blip>
-          <a:stretch>
-            <a:fillRect/>
-          </a:stretch>
-        </p:blipFill>
-        <p:spPr>
-          <a:xfrm>
-            <a:off x="3365824" y="3749850"/>
-            <a:ext cx="798700" cy="651813"/>
-          </a:xfrm>
-          <a:prstGeom prst="rect">
-            <a:avLst/>
-          </a:prstGeom>
-        </p:spPr>
-      </p:pic>
-      <p:pic>
-        <p:nvPicPr>
-          <p:cNvPr id="20" name="Picture 19">
-            <a:extLst>
-              <a:ext uri="{FF2B5EF4-FFF2-40B4-BE49-F238E27FC236}">
-                <a16:creationId xmlns:a16="http://schemas.microsoft.com/office/drawing/2014/main" id="{9E2B5B90-76A4-49A8-8B8A-565FB77AA0BC}"/>
-              </a:ext>
-            </a:extLst>
-          </p:cNvPr>
-          <p:cNvPicPr>
-            <a:picLocks noChangeAspect="1"/>
-          </p:cNvPicPr>
-          <p:nvPr/>
-        </p:nvPicPr>
-        <p:blipFill>
-          <a:blip r:embed="rId2">
-            <a:extLst>
-              <a:ext uri="{28A0092B-C50C-407E-A947-70E740481C1C}">
-                <a14:useLocalDpi xmlns:a14="http://schemas.microsoft.com/office/drawing/2010/main" val="0"/>
-              </a:ext>
-            </a:extLst>
-          </a:blip>
-          <a:stretch>
-            <a:fillRect/>
-          </a:stretch>
-        </p:blipFill>
-        <p:spPr>
-          <a:xfrm>
-            <a:off x="3365824" y="2444186"/>
-            <a:ext cx="798700" cy="651813"/>
-          </a:xfrm>
-          <a:prstGeom prst="rect">
-            <a:avLst/>
-          </a:prstGeom>
-        </p:spPr>
-      </p:pic>
       <p:sp>
         <p:nvSpPr>
           <p:cNvPr id="4" name="Rectangle: Rounded Corners 3">
@@ -3470,8 +3362,8 @@
         </p:nvSpPr>
         <p:spPr>
           <a:xfrm>
-            <a:off x="1828799" y="1649506"/>
-            <a:ext cx="1658471" cy="878541"/>
+            <a:off x="7723092" y="2456330"/>
+            <a:ext cx="1528481" cy="576393"/>
           </a:xfrm>
           <a:prstGeom prst="roundRect">
             <a:avLst/>
@@ -3519,18 +3411,20 @@
         </p:nvSpPr>
         <p:spPr>
           <a:xfrm>
-            <a:off x="1828799" y="2989729"/>
-            <a:ext cx="1658471" cy="878541"/>
+            <a:off x="9475692" y="2456330"/>
+            <a:ext cx="1528481" cy="576393"/>
           </a:xfrm>
           <a:prstGeom prst="roundRect">
             <a:avLst/>
           </a:prstGeom>
           <a:solidFill>
-            <a:schemeClr val="accent2"/>
+            <a:schemeClr val="accent6"/>
           </a:solidFill>
           <a:ln>
             <a:solidFill>
-              <a:schemeClr val="accent2"/>
+              <a:schemeClr val="accent6">
+                <a:lumMod val="75000"/>
+              </a:schemeClr>
             </a:solidFill>
           </a:ln>
         </p:spPr>
@@ -3576,8 +3470,8 @@
         </p:nvSpPr>
         <p:spPr>
           <a:xfrm>
-            <a:off x="4043079" y="1649505"/>
-            <a:ext cx="1147486" cy="878541"/>
+            <a:off x="7911347" y="3460374"/>
+            <a:ext cx="1147486" cy="596154"/>
           </a:xfrm>
           <a:prstGeom prst="can">
             <a:avLst/>
@@ -3625,18 +3519,20 @@
         </p:nvSpPr>
         <p:spPr>
           <a:xfrm>
-            <a:off x="4043079" y="2989728"/>
-            <a:ext cx="1147486" cy="878541"/>
+            <a:off x="9663947" y="3460374"/>
+            <a:ext cx="1147486" cy="596154"/>
           </a:xfrm>
           <a:prstGeom prst="can">
             <a:avLst/>
           </a:prstGeom>
           <a:solidFill>
-            <a:schemeClr val="accent2"/>
+            <a:schemeClr val="accent6"/>
           </a:solidFill>
           <a:ln>
             <a:solidFill>
-              <a:schemeClr val="accent2"/>
+              <a:schemeClr val="accent6">
+                <a:lumMod val="75000"/>
+              </a:schemeClr>
             </a:solidFill>
           </a:ln>
         </p:spPr>
@@ -3679,15 +3575,15 @@
           </p:cNvPr>
           <p:cNvCxnSpPr>
             <a:cxnSpLocks/>
-            <a:stCxn id="4" idx="3"/>
-            <a:endCxn id="6" idx="2"/>
+            <a:stCxn id="4" idx="2"/>
+            <a:endCxn id="6" idx="1"/>
           </p:cNvCxnSpPr>
           <p:nvPr/>
         </p:nvCxnSpPr>
         <p:spPr>
-          <a:xfrm flipV="1">
-            <a:off x="3487270" y="2088776"/>
-            <a:ext cx="555809" cy="1"/>
+          <a:xfrm flipH="1">
+            <a:off x="8485090" y="3032723"/>
+            <a:ext cx="2243" cy="427651"/>
           </a:xfrm>
           <a:prstGeom prst="straightConnector1">
             <a:avLst/>
@@ -3723,15 +3619,15 @@
           </p:cNvPr>
           <p:cNvCxnSpPr>
             <a:cxnSpLocks/>
-            <a:stCxn id="5" idx="3"/>
-            <a:endCxn id="7" idx="2"/>
+            <a:stCxn id="5" idx="2"/>
+            <a:endCxn id="7" idx="1"/>
           </p:cNvCxnSpPr>
           <p:nvPr/>
         </p:nvCxnSpPr>
         <p:spPr>
-          <a:xfrm flipV="1">
-            <a:off x="3487270" y="3428999"/>
-            <a:ext cx="555809" cy="1"/>
+          <a:xfrm flipH="1">
+            <a:off x="10237690" y="3032723"/>
+            <a:ext cx="2243" cy="427651"/>
           </a:xfrm>
           <a:prstGeom prst="straightConnector1">
             <a:avLst/>
@@ -3759,12 +3655,173 @@
           </a:fontRef>
         </p:style>
       </p:cxnSp>
-      <p:sp>
-        <p:nvSpPr>
-          <p:cNvPr id="16" name="Rectangle: Rounded Corners 15">
-            <a:extLst>
-              <a:ext uri="{FF2B5EF4-FFF2-40B4-BE49-F238E27FC236}">
-                <a16:creationId xmlns:a16="http://schemas.microsoft.com/office/drawing/2014/main" id="{5D00304B-A655-4D3F-8177-4117FD6869F4}"/>
+      <p:cxnSp>
+        <p:nvCxnSpPr>
+          <p:cNvPr id="23" name="Straight Arrow Connector 22">
+            <a:extLst>
+              <a:ext uri="{FF2B5EF4-FFF2-40B4-BE49-F238E27FC236}">
+                <a16:creationId xmlns:a16="http://schemas.microsoft.com/office/drawing/2014/main" id="{FAC96440-9FC4-45E0-94EF-A3B8A9AB6CD1}"/>
+              </a:ext>
+            </a:extLst>
+          </p:cNvPr>
+          <p:cNvCxnSpPr>
+            <a:cxnSpLocks/>
+            <a:stCxn id="25" idx="2"/>
+            <a:endCxn id="4" idx="0"/>
+          </p:cNvCxnSpPr>
+          <p:nvPr/>
+        </p:nvCxnSpPr>
+        <p:spPr>
+          <a:xfrm>
+            <a:off x="8485090" y="2146982"/>
+            <a:ext cx="2243" cy="309348"/>
+          </a:xfrm>
+          <a:prstGeom prst="straightConnector1">
+            <a:avLst/>
+          </a:prstGeom>
+          <a:ln>
+            <a:headEnd type="triangle"/>
+            <a:tailEnd type="triangle"/>
+          </a:ln>
+        </p:spPr>
+        <p:style>
+          <a:lnRef idx="1">
+            <a:schemeClr val="accent1"/>
+          </a:lnRef>
+          <a:fillRef idx="0">
+            <a:schemeClr val="accent1"/>
+          </a:fillRef>
+          <a:effectRef idx="0">
+            <a:schemeClr val="accent1"/>
+          </a:effectRef>
+          <a:fontRef idx="minor">
+            <a:schemeClr val="tx1"/>
+          </a:fontRef>
+        </p:style>
+      </p:cxnSp>
+      <p:cxnSp>
+        <p:nvCxnSpPr>
+          <p:cNvPr id="24" name="Straight Arrow Connector 23">
+            <a:extLst>
+              <a:ext uri="{FF2B5EF4-FFF2-40B4-BE49-F238E27FC236}">
+                <a16:creationId xmlns:a16="http://schemas.microsoft.com/office/drawing/2014/main" id="{046EF812-79A3-4C27-B4AF-E2FC38831C88}"/>
+              </a:ext>
+            </a:extLst>
+          </p:cNvPr>
+          <p:cNvCxnSpPr>
+            <a:cxnSpLocks/>
+            <a:stCxn id="26" idx="2"/>
+            <a:endCxn id="5" idx="0"/>
+          </p:cNvCxnSpPr>
+          <p:nvPr/>
+        </p:nvCxnSpPr>
+        <p:spPr>
+          <a:xfrm flipH="1">
+            <a:off x="10239933" y="2146982"/>
+            <a:ext cx="2241" cy="309348"/>
+          </a:xfrm>
+          <a:prstGeom prst="straightConnector1">
+            <a:avLst/>
+          </a:prstGeom>
+          <a:ln>
+            <a:solidFill>
+              <a:schemeClr val="accent2"/>
+            </a:solidFill>
+            <a:headEnd type="triangle"/>
+            <a:tailEnd type="triangle"/>
+          </a:ln>
+        </p:spPr>
+        <p:style>
+          <a:lnRef idx="1">
+            <a:schemeClr val="accent1"/>
+          </a:lnRef>
+          <a:fillRef idx="0">
+            <a:schemeClr val="accent1"/>
+          </a:fillRef>
+          <a:effectRef idx="0">
+            <a:schemeClr val="accent1"/>
+          </a:effectRef>
+          <a:fontRef idx="minor">
+            <a:schemeClr val="tx1"/>
+          </a:fontRef>
+        </p:style>
+      </p:cxnSp>
+      <p:sp>
+        <p:nvSpPr>
+          <p:cNvPr id="25" name="TextBox 24">
+            <a:extLst>
+              <a:ext uri="{FF2B5EF4-FFF2-40B4-BE49-F238E27FC236}">
+                <a16:creationId xmlns:a16="http://schemas.microsoft.com/office/drawing/2014/main" id="{B0B8E577-DABC-4503-9980-243FD7F22AAB}"/>
+              </a:ext>
+            </a:extLst>
+          </p:cNvPr>
+          <p:cNvSpPr txBox="1"/>
+          <p:nvPr/>
+        </p:nvSpPr>
+        <p:spPr>
+          <a:xfrm>
+            <a:off x="7911347" y="1131319"/>
+            <a:ext cx="1147486" cy="1015663"/>
+          </a:xfrm>
+          <a:prstGeom prst="rect">
+            <a:avLst/>
+          </a:prstGeom>
+          <a:noFill/>
+        </p:spPr>
+        <p:txBody>
+          <a:bodyPr wrap="square">
+            <a:spAutoFit/>
+          </a:bodyPr>
+          <a:lstStyle/>
+          <a:p>
+            <a:r>
+              <a:rPr lang="fr-FR" sz="6000" dirty="0"/>
+              <a:t>🧑‍🧑‍🧒‍🧒</a:t>
+            </a:r>
+          </a:p>
+        </p:txBody>
+      </p:sp>
+      <p:sp>
+        <p:nvSpPr>
+          <p:cNvPr id="26" name="TextBox 25">
+            <a:extLst>
+              <a:ext uri="{FF2B5EF4-FFF2-40B4-BE49-F238E27FC236}">
+                <a16:creationId xmlns:a16="http://schemas.microsoft.com/office/drawing/2014/main" id="{2B83E027-3147-45E4-BA0B-440CF062838F}"/>
+              </a:ext>
+            </a:extLst>
+          </p:cNvPr>
+          <p:cNvSpPr txBox="1"/>
+          <p:nvPr/>
+        </p:nvSpPr>
+        <p:spPr>
+          <a:xfrm>
+            <a:off x="9668431" y="1131319"/>
+            <a:ext cx="1147486" cy="1015663"/>
+          </a:xfrm>
+          <a:prstGeom prst="rect">
+            <a:avLst/>
+          </a:prstGeom>
+          <a:noFill/>
+        </p:spPr>
+        <p:txBody>
+          <a:bodyPr wrap="square">
+            <a:spAutoFit/>
+          </a:bodyPr>
+          <a:lstStyle/>
+          <a:p>
+            <a:r>
+              <a:rPr lang="fr-FR" sz="6000" dirty="0"/>
+              <a:t>🧑‍🧑‍🧒‍🧒</a:t>
+            </a:r>
+          </a:p>
+        </p:txBody>
+      </p:sp>
+      <p:sp>
+        <p:nvSpPr>
+          <p:cNvPr id="40" name="Rectangle: Rounded Corners 39">
+            <a:extLst>
+              <a:ext uri="{FF2B5EF4-FFF2-40B4-BE49-F238E27FC236}">
+                <a16:creationId xmlns:a16="http://schemas.microsoft.com/office/drawing/2014/main" id="{22BB816D-48C6-4D37-B592-7DBAC93FFAA1}"/>
               </a:ext>
             </a:extLst>
           </p:cNvPr>
@@ -3773,22 +3830,12 @@
         </p:nvSpPr>
         <p:spPr>
           <a:xfrm>
-            <a:off x="1828799" y="4307539"/>
-            <a:ext cx="1658471" cy="878541"/>
+            <a:off x="995088" y="3342071"/>
+            <a:ext cx="1528481" cy="576393"/>
           </a:xfrm>
           <a:prstGeom prst="roundRect">
             <a:avLst/>
           </a:prstGeom>
-          <a:solidFill>
-            <a:schemeClr val="accent6">
-              <a:lumMod val="75000"/>
-            </a:schemeClr>
-          </a:solidFill>
-          <a:ln>
-            <a:solidFill>
-              <a:schemeClr val="accent6"/>
-            </a:solidFill>
-          </a:ln>
         </p:spPr>
         <p:style>
           <a:lnRef idx="2">
@@ -3813,17 +3860,17 @@
             <a:pPr algn="ctr"/>
             <a:r>
               <a:rPr lang="fr-FR" dirty="0"/>
-              <a:t>Application C</a:t>
-            </a:r>
-          </a:p>
-        </p:txBody>
-      </p:sp>
-      <p:sp>
-        <p:nvSpPr>
-          <p:cNvPr id="17" name="Cylinder 16">
-            <a:extLst>
-              <a:ext uri="{FF2B5EF4-FFF2-40B4-BE49-F238E27FC236}">
-                <a16:creationId xmlns:a16="http://schemas.microsoft.com/office/drawing/2014/main" id="{5AB9E1A9-575F-44E9-BAA8-7841322243A4}"/>
+              <a:t>Application A</a:t>
+            </a:r>
+          </a:p>
+        </p:txBody>
+      </p:sp>
+      <p:sp>
+        <p:nvSpPr>
+          <p:cNvPr id="41" name="Rectangle: Rounded Corners 40">
+            <a:extLst>
+              <a:ext uri="{FF2B5EF4-FFF2-40B4-BE49-F238E27FC236}">
+                <a16:creationId xmlns:a16="http://schemas.microsoft.com/office/drawing/2014/main" id="{51FBE995-4834-4BD0-9D93-6DF3429F879B}"/>
               </a:ext>
             </a:extLst>
           </p:cNvPr>
@@ -3832,20 +3879,20 @@
         </p:nvSpPr>
         <p:spPr>
           <a:xfrm>
-            <a:off x="4043079" y="4307538"/>
-            <a:ext cx="1147486" cy="878541"/>
-          </a:xfrm>
-          <a:prstGeom prst="can">
+            <a:off x="2747688" y="3342071"/>
+            <a:ext cx="1528481" cy="576393"/>
+          </a:xfrm>
+          <a:prstGeom prst="roundRect">
             <a:avLst/>
           </a:prstGeom>
           <a:solidFill>
-            <a:schemeClr val="accent6">
-              <a:lumMod val="75000"/>
-            </a:schemeClr>
+            <a:schemeClr val="accent6"/>
           </a:solidFill>
           <a:ln>
             <a:solidFill>
-              <a:schemeClr val="accent6"/>
+              <a:schemeClr val="accent6">
+                <a:lumMod val="75000"/>
+              </a:schemeClr>
             </a:solidFill>
           </a:ln>
         </p:spPr>
@@ -3872,38 +3919,514 @@
             <a:pPr algn="ctr"/>
             <a:r>
               <a:rPr lang="fr-FR" dirty="0"/>
-              <a:t>Serveur C</a:t>
+              <a:t>Application B</a:t>
+            </a:r>
+          </a:p>
+        </p:txBody>
+      </p:sp>
+      <p:sp>
+        <p:nvSpPr>
+          <p:cNvPr id="42" name="Cylinder 41">
+            <a:extLst>
+              <a:ext uri="{FF2B5EF4-FFF2-40B4-BE49-F238E27FC236}">
+                <a16:creationId xmlns:a16="http://schemas.microsoft.com/office/drawing/2014/main" id="{DD5844DB-A890-45F4-9F7D-3E9B6F173879}"/>
+              </a:ext>
+            </a:extLst>
+          </p:cNvPr>
+          <p:cNvSpPr/>
+          <p:nvPr/>
+        </p:nvSpPr>
+        <p:spPr>
+          <a:xfrm>
+            <a:off x="1183343" y="5036398"/>
+            <a:ext cx="1147486" cy="596154"/>
+          </a:xfrm>
+          <a:prstGeom prst="can">
+            <a:avLst/>
+          </a:prstGeom>
+        </p:spPr>
+        <p:style>
+          <a:lnRef idx="2">
+            <a:schemeClr val="accent1">
+              <a:shade val="50000"/>
+            </a:schemeClr>
+          </a:lnRef>
+          <a:fillRef idx="1">
+            <a:schemeClr val="accent1"/>
+          </a:fillRef>
+          <a:effectRef idx="0">
+            <a:schemeClr val="accent1"/>
+          </a:effectRef>
+          <a:fontRef idx="minor">
+            <a:schemeClr val="lt1"/>
+          </a:fontRef>
+        </p:style>
+        <p:txBody>
+          <a:bodyPr rtlCol="0" anchor="ctr"/>
+          <a:lstStyle/>
+          <a:p>
+            <a:pPr algn="ctr"/>
+            <a:r>
+              <a:rPr lang="fr-FR" dirty="0"/>
+              <a:t>Serveur A</a:t>
+            </a:r>
+          </a:p>
+        </p:txBody>
+      </p:sp>
+      <p:sp>
+        <p:nvSpPr>
+          <p:cNvPr id="43" name="Cylinder 42">
+            <a:extLst>
+              <a:ext uri="{FF2B5EF4-FFF2-40B4-BE49-F238E27FC236}">
+                <a16:creationId xmlns:a16="http://schemas.microsoft.com/office/drawing/2014/main" id="{DEA2A043-E53E-4B10-AEFC-00B754976394}"/>
+              </a:ext>
+            </a:extLst>
+          </p:cNvPr>
+          <p:cNvSpPr/>
+          <p:nvPr/>
+        </p:nvSpPr>
+        <p:spPr>
+          <a:xfrm>
+            <a:off x="2935943" y="5036398"/>
+            <a:ext cx="1147486" cy="596154"/>
+          </a:xfrm>
+          <a:prstGeom prst="can">
+            <a:avLst/>
+          </a:prstGeom>
+          <a:solidFill>
+            <a:schemeClr val="accent6"/>
+          </a:solidFill>
+          <a:ln>
+            <a:solidFill>
+              <a:schemeClr val="accent6">
+                <a:lumMod val="75000"/>
+              </a:schemeClr>
+            </a:solidFill>
+          </a:ln>
+        </p:spPr>
+        <p:style>
+          <a:lnRef idx="2">
+            <a:schemeClr val="accent1">
+              <a:shade val="50000"/>
+            </a:schemeClr>
+          </a:lnRef>
+          <a:fillRef idx="1">
+            <a:schemeClr val="accent1"/>
+          </a:fillRef>
+          <a:effectRef idx="0">
+            <a:schemeClr val="accent1"/>
+          </a:effectRef>
+          <a:fontRef idx="minor">
+            <a:schemeClr val="lt1"/>
+          </a:fontRef>
+        </p:style>
+        <p:txBody>
+          <a:bodyPr rtlCol="0" anchor="ctr"/>
+          <a:lstStyle/>
+          <a:p>
+            <a:pPr algn="ctr"/>
+            <a:r>
+              <a:rPr lang="fr-FR" dirty="0"/>
+              <a:t>Serveur B</a:t>
             </a:r>
           </a:p>
         </p:txBody>
       </p:sp>
       <p:cxnSp>
         <p:nvCxnSpPr>
-          <p:cNvPr id="18" name="Straight Arrow Connector 17">
-            <a:extLst>
-              <a:ext uri="{FF2B5EF4-FFF2-40B4-BE49-F238E27FC236}">
-                <a16:creationId xmlns:a16="http://schemas.microsoft.com/office/drawing/2014/main" id="{9F6A6ACA-F8C3-4570-AE3C-6AA283630F67}"/>
+          <p:cNvPr id="44" name="Straight Arrow Connector 43">
+            <a:extLst>
+              <a:ext uri="{FF2B5EF4-FFF2-40B4-BE49-F238E27FC236}">
+                <a16:creationId xmlns:a16="http://schemas.microsoft.com/office/drawing/2014/main" id="{261F2E27-3961-40C0-AF94-2EDDC7622675}"/>
               </a:ext>
             </a:extLst>
           </p:cNvPr>
           <p:cNvCxnSpPr>
             <a:cxnSpLocks/>
-            <a:stCxn id="16" idx="3"/>
-            <a:endCxn id="17" idx="2"/>
+            <a:stCxn id="40" idx="2"/>
+            <a:endCxn id="42" idx="1"/>
           </p:cNvCxnSpPr>
           <p:nvPr/>
         </p:nvCxnSpPr>
         <p:spPr>
-          <a:xfrm flipV="1">
-            <a:off x="3487270" y="4746809"/>
-            <a:ext cx="555809" cy="1"/>
+          <a:xfrm flipH="1">
+            <a:off x="1757086" y="3918464"/>
+            <a:ext cx="2243" cy="1117934"/>
+          </a:xfrm>
+          <a:prstGeom prst="straightConnector1">
+            <a:avLst/>
+          </a:prstGeom>
+          <a:ln>
+            <a:headEnd type="triangle"/>
+            <a:tailEnd type="triangle"/>
+          </a:ln>
+        </p:spPr>
+        <p:style>
+          <a:lnRef idx="1">
+            <a:schemeClr val="accent1"/>
+          </a:lnRef>
+          <a:fillRef idx="0">
+            <a:schemeClr val="accent1"/>
+          </a:fillRef>
+          <a:effectRef idx="0">
+            <a:schemeClr val="accent1"/>
+          </a:effectRef>
+          <a:fontRef idx="minor">
+            <a:schemeClr val="tx1"/>
+          </a:fontRef>
+        </p:style>
+      </p:cxnSp>
+      <p:cxnSp>
+        <p:nvCxnSpPr>
+          <p:cNvPr id="45" name="Straight Arrow Connector 44">
+            <a:extLst>
+              <a:ext uri="{FF2B5EF4-FFF2-40B4-BE49-F238E27FC236}">
+                <a16:creationId xmlns:a16="http://schemas.microsoft.com/office/drawing/2014/main" id="{BDCF54F2-1EC5-437D-868B-A76118E128A6}"/>
+              </a:ext>
+            </a:extLst>
+          </p:cNvPr>
+          <p:cNvCxnSpPr>
+            <a:cxnSpLocks/>
+            <a:stCxn id="41" idx="2"/>
+            <a:endCxn id="43" idx="1"/>
+          </p:cNvCxnSpPr>
+          <p:nvPr/>
+        </p:nvCxnSpPr>
+        <p:spPr>
+          <a:xfrm flipH="1">
+            <a:off x="3509686" y="3918464"/>
+            <a:ext cx="2243" cy="1117934"/>
           </a:xfrm>
           <a:prstGeom prst="straightConnector1">
             <a:avLst/>
           </a:prstGeom>
           <a:ln>
             <a:solidFill>
-              <a:schemeClr val="accent6"/>
+              <a:schemeClr val="accent2"/>
+            </a:solidFill>
+            <a:headEnd type="triangle"/>
+            <a:tailEnd type="triangle"/>
+          </a:ln>
+        </p:spPr>
+        <p:style>
+          <a:lnRef idx="1">
+            <a:schemeClr val="accent1"/>
+          </a:lnRef>
+          <a:fillRef idx="0">
+            <a:schemeClr val="accent1"/>
+          </a:fillRef>
+          <a:effectRef idx="0">
+            <a:schemeClr val="accent1"/>
+          </a:effectRef>
+          <a:fontRef idx="minor">
+            <a:schemeClr val="tx1"/>
+          </a:fontRef>
+        </p:style>
+      </p:cxnSp>
+      <p:cxnSp>
+        <p:nvCxnSpPr>
+          <p:cNvPr id="46" name="Straight Arrow Connector 45">
+            <a:extLst>
+              <a:ext uri="{FF2B5EF4-FFF2-40B4-BE49-F238E27FC236}">
+                <a16:creationId xmlns:a16="http://schemas.microsoft.com/office/drawing/2014/main" id="{11D69671-516C-4E75-B4A4-26E2179BFC83}"/>
+              </a:ext>
+            </a:extLst>
+          </p:cNvPr>
+          <p:cNvCxnSpPr>
+            <a:cxnSpLocks/>
+            <a:stCxn id="48" idx="2"/>
+            <a:endCxn id="40" idx="0"/>
+          </p:cNvCxnSpPr>
+          <p:nvPr/>
+        </p:nvCxnSpPr>
+        <p:spPr>
+          <a:xfrm>
+            <a:off x="1757086" y="3032723"/>
+            <a:ext cx="2243" cy="309348"/>
+          </a:xfrm>
+          <a:prstGeom prst="straightConnector1">
+            <a:avLst/>
+          </a:prstGeom>
+          <a:ln>
+            <a:headEnd type="triangle"/>
+            <a:tailEnd type="triangle"/>
+          </a:ln>
+        </p:spPr>
+        <p:style>
+          <a:lnRef idx="1">
+            <a:schemeClr val="accent1"/>
+          </a:lnRef>
+          <a:fillRef idx="0">
+            <a:schemeClr val="accent1"/>
+          </a:fillRef>
+          <a:effectRef idx="0">
+            <a:schemeClr val="accent1"/>
+          </a:effectRef>
+          <a:fontRef idx="minor">
+            <a:schemeClr val="tx1"/>
+          </a:fontRef>
+        </p:style>
+      </p:cxnSp>
+      <p:cxnSp>
+        <p:nvCxnSpPr>
+          <p:cNvPr id="47" name="Straight Arrow Connector 46">
+            <a:extLst>
+              <a:ext uri="{FF2B5EF4-FFF2-40B4-BE49-F238E27FC236}">
+                <a16:creationId xmlns:a16="http://schemas.microsoft.com/office/drawing/2014/main" id="{1CE7CD7C-2C56-462B-B6B5-DC8477A50C08}"/>
+              </a:ext>
+            </a:extLst>
+          </p:cNvPr>
+          <p:cNvCxnSpPr>
+            <a:cxnSpLocks/>
+            <a:stCxn id="49" idx="2"/>
+            <a:endCxn id="41" idx="0"/>
+          </p:cNvCxnSpPr>
+          <p:nvPr/>
+        </p:nvCxnSpPr>
+        <p:spPr>
+          <a:xfrm flipH="1">
+            <a:off x="3511929" y="3032723"/>
+            <a:ext cx="2241" cy="309348"/>
+          </a:xfrm>
+          <a:prstGeom prst="straightConnector1">
+            <a:avLst/>
+          </a:prstGeom>
+          <a:ln>
+            <a:solidFill>
+              <a:schemeClr val="accent2"/>
+            </a:solidFill>
+            <a:headEnd type="triangle"/>
+            <a:tailEnd type="triangle"/>
+          </a:ln>
+        </p:spPr>
+        <p:style>
+          <a:lnRef idx="1">
+            <a:schemeClr val="accent1"/>
+          </a:lnRef>
+          <a:fillRef idx="0">
+            <a:schemeClr val="accent1"/>
+          </a:fillRef>
+          <a:effectRef idx="0">
+            <a:schemeClr val="accent1"/>
+          </a:effectRef>
+          <a:fontRef idx="minor">
+            <a:schemeClr val="tx1"/>
+          </a:fontRef>
+        </p:style>
+      </p:cxnSp>
+      <p:sp>
+        <p:nvSpPr>
+          <p:cNvPr id="48" name="TextBox 47">
+            <a:extLst>
+              <a:ext uri="{FF2B5EF4-FFF2-40B4-BE49-F238E27FC236}">
+                <a16:creationId xmlns:a16="http://schemas.microsoft.com/office/drawing/2014/main" id="{CE47569F-1208-458B-B5DC-D9A843642959}"/>
+              </a:ext>
+            </a:extLst>
+          </p:cNvPr>
+          <p:cNvSpPr txBox="1"/>
+          <p:nvPr/>
+        </p:nvSpPr>
+        <p:spPr>
+          <a:xfrm>
+            <a:off x="1183343" y="2017060"/>
+            <a:ext cx="1147486" cy="1015663"/>
+          </a:xfrm>
+          <a:prstGeom prst="rect">
+            <a:avLst/>
+          </a:prstGeom>
+          <a:noFill/>
+        </p:spPr>
+        <p:txBody>
+          <a:bodyPr wrap="square">
+            <a:spAutoFit/>
+          </a:bodyPr>
+          <a:lstStyle/>
+          <a:p>
+            <a:r>
+              <a:rPr lang="fr-FR" sz="6000" dirty="0"/>
+              <a:t>🧑‍🧑‍🧒‍🧒</a:t>
+            </a:r>
+          </a:p>
+        </p:txBody>
+      </p:sp>
+      <p:sp>
+        <p:nvSpPr>
+          <p:cNvPr id="49" name="TextBox 48">
+            <a:extLst>
+              <a:ext uri="{FF2B5EF4-FFF2-40B4-BE49-F238E27FC236}">
+                <a16:creationId xmlns:a16="http://schemas.microsoft.com/office/drawing/2014/main" id="{13E97ED6-2B11-4483-961A-3C8D02231630}"/>
+              </a:ext>
+            </a:extLst>
+          </p:cNvPr>
+          <p:cNvSpPr txBox="1"/>
+          <p:nvPr/>
+        </p:nvSpPr>
+        <p:spPr>
+          <a:xfrm>
+            <a:off x="2940427" y="2017060"/>
+            <a:ext cx="1147486" cy="1015663"/>
+          </a:xfrm>
+          <a:prstGeom prst="rect">
+            <a:avLst/>
+          </a:prstGeom>
+          <a:noFill/>
+        </p:spPr>
+        <p:txBody>
+          <a:bodyPr wrap="square">
+            <a:spAutoFit/>
+          </a:bodyPr>
+          <a:lstStyle/>
+          <a:p>
+            <a:r>
+              <a:rPr lang="fr-FR" sz="6000" dirty="0"/>
+              <a:t>🧑‍🧑‍🧒‍🧒</a:t>
+            </a:r>
+          </a:p>
+        </p:txBody>
+      </p:sp>
+      <p:pic>
+        <p:nvPicPr>
+          <p:cNvPr id="51" name="Picture 50">
+            <a:extLst>
+              <a:ext uri="{FF2B5EF4-FFF2-40B4-BE49-F238E27FC236}">
+                <a16:creationId xmlns:a16="http://schemas.microsoft.com/office/drawing/2014/main" id="{D77C3C8C-DD15-4BF1-953C-E98C04367162}"/>
+              </a:ext>
+            </a:extLst>
+          </p:cNvPr>
+          <p:cNvPicPr>
+            <a:picLocks noChangeAspect="1"/>
+          </p:cNvPicPr>
+          <p:nvPr/>
+        </p:nvPicPr>
+        <p:blipFill>
+          <a:blip r:embed="rId2">
+            <a:extLst>
+              <a:ext uri="{28A0092B-C50C-407E-A947-70E740481C1C}">
+                <a14:useLocalDpi xmlns:a14="http://schemas.microsoft.com/office/drawing/2010/main" val="0"/>
+              </a:ext>
+            </a:extLst>
+          </a:blip>
+          <a:stretch>
+            <a:fillRect/>
+          </a:stretch>
+        </p:blipFill>
+        <p:spPr>
+          <a:xfrm>
+            <a:off x="1444586" y="4164931"/>
+            <a:ext cx="625000" cy="625000"/>
+          </a:xfrm>
+          <a:prstGeom prst="rect">
+            <a:avLst/>
+          </a:prstGeom>
+        </p:spPr>
+      </p:pic>
+      <p:pic>
+        <p:nvPicPr>
+          <p:cNvPr id="52" name="Picture 51">
+            <a:extLst>
+              <a:ext uri="{FF2B5EF4-FFF2-40B4-BE49-F238E27FC236}">
+                <a16:creationId xmlns:a16="http://schemas.microsoft.com/office/drawing/2014/main" id="{4A0C4C0D-18ED-46DA-8A63-ADFD10F4B4B0}"/>
+              </a:ext>
+            </a:extLst>
+          </p:cNvPr>
+          <p:cNvPicPr>
+            <a:picLocks noChangeAspect="1"/>
+          </p:cNvPicPr>
+          <p:nvPr/>
+        </p:nvPicPr>
+        <p:blipFill>
+          <a:blip r:embed="rId2">
+            <a:extLst>
+              <a:ext uri="{28A0092B-C50C-407E-A947-70E740481C1C}">
+                <a14:useLocalDpi xmlns:a14="http://schemas.microsoft.com/office/drawing/2010/main" val="0"/>
+              </a:ext>
+            </a:extLst>
+          </a:blip>
+          <a:stretch>
+            <a:fillRect/>
+          </a:stretch>
+        </p:blipFill>
+        <p:spPr>
+          <a:xfrm>
+            <a:off x="3197186" y="4164931"/>
+            <a:ext cx="625000" cy="625000"/>
+          </a:xfrm>
+          <a:prstGeom prst="rect">
+            <a:avLst/>
+          </a:prstGeom>
+        </p:spPr>
+      </p:pic>
+      <p:cxnSp>
+        <p:nvCxnSpPr>
+          <p:cNvPr id="53" name="Straight Arrow Connector 52">
+            <a:extLst>
+              <a:ext uri="{FF2B5EF4-FFF2-40B4-BE49-F238E27FC236}">
+                <a16:creationId xmlns:a16="http://schemas.microsoft.com/office/drawing/2014/main" id="{9D522AA0-C9B0-449A-A21C-3B763BABFD4B}"/>
+              </a:ext>
+            </a:extLst>
+          </p:cNvPr>
+          <p:cNvCxnSpPr>
+            <a:cxnSpLocks/>
+            <a:stCxn id="40" idx="2"/>
+            <a:endCxn id="52" idx="1"/>
+          </p:cNvCxnSpPr>
+          <p:nvPr/>
+        </p:nvCxnSpPr>
+        <p:spPr>
+          <a:xfrm>
+            <a:off x="1759329" y="3918464"/>
+            <a:ext cx="1437857" cy="558967"/>
+          </a:xfrm>
+          <a:prstGeom prst="straightConnector1">
+            <a:avLst/>
+          </a:prstGeom>
+          <a:ln>
+            <a:headEnd type="triangle"/>
+            <a:tailEnd type="triangle"/>
+          </a:ln>
+        </p:spPr>
+        <p:style>
+          <a:lnRef idx="1">
+            <a:schemeClr val="accent1"/>
+          </a:lnRef>
+          <a:fillRef idx="0">
+            <a:schemeClr val="accent1"/>
+          </a:fillRef>
+          <a:effectRef idx="0">
+            <a:schemeClr val="accent1"/>
+          </a:effectRef>
+          <a:fontRef idx="minor">
+            <a:schemeClr val="tx1"/>
+          </a:fontRef>
+        </p:style>
+      </p:cxnSp>
+      <p:cxnSp>
+        <p:nvCxnSpPr>
+          <p:cNvPr id="56" name="Straight Arrow Connector 55">
+            <a:extLst>
+              <a:ext uri="{FF2B5EF4-FFF2-40B4-BE49-F238E27FC236}">
+                <a16:creationId xmlns:a16="http://schemas.microsoft.com/office/drawing/2014/main" id="{10B3F8A7-66EF-496B-9426-40B5AE68CCA2}"/>
+              </a:ext>
+            </a:extLst>
+          </p:cNvPr>
+          <p:cNvCxnSpPr>
+            <a:cxnSpLocks/>
+            <a:stCxn id="41" idx="2"/>
+            <a:endCxn id="51" idx="3"/>
+          </p:cNvCxnSpPr>
+          <p:nvPr/>
+        </p:nvCxnSpPr>
+        <p:spPr>
+          <a:xfrm flipH="1">
+            <a:off x="2069586" y="3918464"/>
+            <a:ext cx="1442343" cy="558967"/>
+          </a:xfrm>
+          <a:prstGeom prst="straightConnector1">
+            <a:avLst/>
+          </a:prstGeom>
+          <a:ln>
+            <a:solidFill>
+              <a:schemeClr val="accent2"/>
             </a:solidFill>
             <a:headEnd type="triangle"/>
             <a:tailEnd type="triangle"/>
